--- a/docs/paper/diagram-sources-2026-09-16/fig2_cost_model.pptx
+++ b/docs/paper/diagram-sources-2026-09-16/fig2_cost_model.pptx
@@ -4371,7 +4371,7 @@
         <p:spPr>
           <a:xfrm>
             <a:off x="0" y="2304000"/>
-            <a:ext cx="6408000" cy="3672000"/>
+            <a:ext cx="6408000" cy="1656000"/>
           </a:xfrm>
           <a:prstGeom prst="rect">
             <a:avLst/>
@@ -4394,8 +4394,8 @@
         </p:blipFill>
         <p:spPr>
           <a:xfrm>
-            <a:off x="0" y="5976000"/>
-            <a:ext cx="6408000" cy="1656000"/>
+            <a:off x="0" y="3960000"/>
+            <a:ext cx="6408000" cy="3672000"/>
           </a:xfrm>
           <a:prstGeom prst="rect">
             <a:avLst/>
@@ -4480,7 +4480,7 @@
         </p:nvSpPr>
         <p:spPr>
           <a:xfrm>
-            <a:off x="72000" y="5994000"/>
+            <a:off x="72000" y="3978000"/>
             <a:ext cx="252000" cy="180000"/>
           </a:xfrm>
           <a:prstGeom prst="rect">
@@ -5317,7 +5317,7 @@
         <p:spPr>
           <a:xfrm>
             <a:off x="0" y="2304000"/>
-            <a:ext cx="6408000" cy="3672000"/>
+            <a:ext cx="6408000" cy="1656000"/>
           </a:xfrm>
           <a:prstGeom prst="rect">
             <a:avLst/>
@@ -5340,8 +5340,8 @@
         </p:blipFill>
         <p:spPr>
           <a:xfrm>
-            <a:off x="0" y="5976000"/>
-            <a:ext cx="6408000" cy="1656000"/>
+            <a:off x="0" y="3960000"/>
+            <a:ext cx="6408000" cy="3672000"/>
           </a:xfrm>
           <a:prstGeom prst="rect">
             <a:avLst/>
@@ -5426,7 +5426,7 @@
         </p:nvSpPr>
         <p:spPr>
           <a:xfrm>
-            <a:off x="72000" y="5994000"/>
+            <a:off x="72000" y="3978000"/>
             <a:ext cx="252000" cy="180000"/>
           </a:xfrm>
           <a:prstGeom prst="rect">

--- a/docs/paper/diagram-sources-2026-09-16/fig2_cost_model.pptx
+++ b/docs/paper/diagram-sources-2026-09-16/fig2_cost_model.pptx
@@ -3721,8 +3721,8 @@
         </p:nvSpPr>
         <p:spPr>
           <a:xfrm>
-            <a:off x="144000" y="1915200"/>
-            <a:ext cx="2196000" cy="180000"/>
+            <a:off x="-899100" y="1915200"/>
+            <a:ext cx="4282200" cy="180000"/>
           </a:xfrm>
           <a:prstGeom prst="rect">
             <a:avLst/>
@@ -3757,7 +3757,7 @@
                 <a:ea typeface="Arial"/>
                 <a:cs typeface="Arial"/>
               </a:rPr>
-              <a:t>Route and order size</a:t>
+              <a:t>Preparation method and production scale</a:t>
             </a:r>
           </a:p>
         </p:txBody>
@@ -4703,7 +4703,7 @@
                 <a:ea typeface="Malgun Gothic"/>
                 <a:cs typeface="Malgun Gothic"/>
               </a:rPr>
-              <a:t>제조 경로 및 주문량</a:t>
+              <a:t>제조법 및 생산 규모</a:t>
             </a:r>
           </a:p>
         </p:txBody>
